--- a/00_제출/제출본/20260614_데이콘_JB금융그룹_Fin_AI_Challenge_MVP제안서_양식.pptx
+++ b/00_제출/제출본/20260614_데이콘_JB금융그룹_Fin_AI_Challenge_MVP제안서_양식.pptx
@@ -13916,95 +13916,6 @@
           </a:prstGeom>
         </p:spPr>
       </p:pic>
-      <p:sp>
-        <p:nvSpPr>
-          <p:cNvPr id="19" name="TextBox 18"/>
-          <p:cNvSpPr txBox="1"/>
-          <p:nvPr/>
-        </p:nvSpPr>
-        <p:spPr>
-          <a:xfrm>
-            <a:off x="822960" y="1371600"/>
-            <a:ext cx="10424160" cy="4206240"/>
-          </a:xfrm>
-          <a:prstGeom prst="rect">
-            <a:avLst/>
-          </a:prstGeom>
-          <a:noFill/>
-        </p:spPr>
-        <p:txBody>
-          <a:bodyPr wrap="square">
-            <a:spAutoFit/>
-          </a:bodyPr>
-          <a:lstStyle/>
-          <a:p>
-            <a:pPr/>
-            <a:r>
-              <a:rPr sz="1300" b="1">
-                <a:solidFill>
-                  <a:srgbClr val="1F2D3D"/>
-                </a:solidFill>
-              </a:rPr>
-              <a:t>JB LocalGuard OS — 지역 금융 고객 위험 신호를 모아 14종 AI 에이전트가 판단·행동·검증하되, 고객 대상 행동은 사람 승인 전까지 차단하는 금융 AI Agent 운영 콘솔</a:t>
-            </a:r>
-          </a:p>
-          <a:p>
-            <a:pPr/>
-            <a:r>
-              <a:rPr sz="1300" b="0">
-                <a:solidFill>
-                  <a:srgbClr val="556677"/>
-                </a:solidFill>
-              </a:rPr>
-              <a:t>대상: 전북은행·광주은행·JB우리캐피탈 RM·기업금융·사후관리·준법 담당자 (최종 수혜자: 지역 소상공인·개인사업자·전세 고객)</a:t>
-            </a:r>
-          </a:p>
-          <a:p>
-            <a:pPr/>
-            <a:r>
-              <a:rPr sz="1300" b="0">
-                <a:solidFill>
-                  <a:srgbClr val="556677"/>
-                </a:solidFill>
-              </a:rPr>
-              <a:t>문제: 기사·정책·시세·등기·상담·사기경보가 흩어져 위험을 조기에 모아 판단·행동하기 어렵다</a:t>
-            </a:r>
-          </a:p>
-          <a:p>
-            <a:pPr/>
-            <a:r>
-              <a:rPr sz="1300" b="1">
-                <a:solidFill>
-                  <a:srgbClr val="1F2D3D"/>
-                </a:solidFill>
-              </a:rPr>
-              <a:t>차별점: 외부 LLM은 쓰되 고객 원본 PII·신용정보는 외부로 반출하지 않는다 (데이터 등급제·토큰화·모델 라우팅·반출 스캔·감사원장 4중 방어) → 금융권 실도입 가능</a:t>
-            </a:r>
-          </a:p>
-          <a:p>
-            <a:pPr/>
-            <a:r>
-              <a:rPr sz="1300" b="0">
-                <a:solidFill>
-                  <a:srgbClr val="556677"/>
-                </a:solidFill>
-              </a:rPr>
-              <a:t>검증: 정적 MVP에서 케이스→AgentRun→승인→감사 로그 갱신 재현, 골든 패스 3종(sme/jeonse/phishing), Playwright E2E 19종</a:t>
-            </a:r>
-          </a:p>
-          <a:p>
-            <a:pPr/>
-            <a:r>
-              <a:rPr sz="1300" b="0">
-                <a:solidFill>
-                  <a:srgbClr val="556677"/>
-                </a:solidFill>
-              </a:rPr>
-              <a:t>규모: 에이전트 14 · 스킬 25 · 플러그인/MCP 6 · 화면 15</a:t>
-            </a:r>
-          </a:p>
-        </p:txBody>
-      </p:sp>
     </p:spTree>
     <p:extLst>
       <p:ext uri="{BB962C8B-B14F-4D97-AF65-F5344CB8AC3E}">
@@ -14452,70 +14363,161 @@
           </a:bodyPr>
           <a:lstStyle/>
           <a:p>
-            <a:pPr/>
             <a:r>
-              <a:rPr sz="1200" b="1">
-                <a:solidFill>
-                  <a:srgbClr val="1F2D3D"/>
+              <a:rPr lang="en-US" altLang="ko-KR" sz="1400" b="1" dirty="0">
+                <a:solidFill>
+                  <a:srgbClr val="3C7CDE"/>
                 </a:solidFill>
               </a:rPr>
-              <a:t>분산된 위험 신호로 담당자의 조기 대응이 어렵다</a:t>
+              <a:t>[</a:t>
+            </a:r>
+            <a:r>
+              <a:rPr lang="ko-KR" altLang="en-US" sz="1400" b="1" dirty="0">
+                <a:solidFill>
+                  <a:srgbClr val="3C7CDE"/>
+                </a:solidFill>
+              </a:rPr>
+              <a:t>작성방법</a:t>
+            </a:r>
+            <a:r>
+              <a:rPr lang="en-US" altLang="ko-KR" sz="1400" b="1" dirty="0">
+                <a:solidFill>
+                  <a:srgbClr val="3C7CDE"/>
+                </a:solidFill>
+              </a:rPr>
+              <a:t>] – </a:t>
+            </a:r>
+            <a:r>
+              <a:rPr lang="ko-KR" altLang="en-US" sz="1400" b="1" dirty="0">
+                <a:solidFill>
+                  <a:srgbClr val="3C7CDE"/>
+                </a:solidFill>
+              </a:rPr>
+              <a:t>해당 부분은 참고용 안내 문구이며 제거하여도 좋습니다</a:t>
+            </a:r>
+            <a:r>
+              <a:rPr lang="en-US" altLang="ko-KR" sz="1400" b="1" dirty="0">
+                <a:solidFill>
+                  <a:srgbClr val="3C7CDE"/>
+                </a:solidFill>
+              </a:rPr>
+              <a:t>.</a:t>
             </a:r>
           </a:p>
           <a:p>
-            <a:pPr/>
-            <a:r>
-              <a:rPr sz="1200" b="0">
-                <a:solidFill>
-                  <a:srgbClr val="556677"/>
-                </a:solidFill>
-              </a:rPr>
-              <a:t>누가: 담당자 1인이 수십~수백 케이스 — 신호는 기사·정책·시세·등기·상담·사기경보로 분산</a:t>
-            </a:r>
+            <a:endParaRPr lang="en-US" altLang="ko-KR" sz="1400" b="1" dirty="0">
+              <a:solidFill>
+                <a:srgbClr val="3C7CDE"/>
+              </a:solidFill>
+            </a:endParaRPr>
           </a:p>
           <a:p>
-            <a:pPr lvl="1"/>
+            <a:pPr marL="285750" indent="-285750">
+              <a:buFont typeface="Wingdings" panose="05000000000000000000" pitchFamily="2" charset="2"/>
+              <a:buChar char="ü"/>
+            </a:pPr>
             <a:r>
-              <a:rPr sz="1200" b="0">
-                <a:solidFill>
-                  <a:srgbClr val="556677"/>
+              <a:rPr lang="ko-KR" altLang="en-US" i="1">
+                <a:solidFill>
+                  <a:srgbClr val="3C7CDE"/>
                 </a:solidFill>
               </a:rPr>
-              <a:t>Pain(검증): 취약 자영업자 42.7만명(연체율 11.16%)·2024 폐업 100.8만명</a:t>
+              <a:t>발생하는 문제와 </a:t>
             </a:r>
+            <a:r>
+              <a:rPr lang="ko-KR" altLang="en-US" i="1" dirty="0">
+                <a:solidFill>
+                  <a:srgbClr val="3C7CDE"/>
+                </a:solidFill>
+              </a:rPr>
+              <a:t>니즈</a:t>
+            </a:r>
+            <a:endParaRPr lang="en-US" altLang="ko-KR" i="1" dirty="0">
+              <a:solidFill>
+                <a:srgbClr val="3C7CDE"/>
+              </a:solidFill>
+            </a:endParaRPr>
           </a:p>
           <a:p>
-            <a:pPr lvl="1"/>
+            <a:pPr marL="285750" indent="-285750">
+              <a:buFont typeface="Wingdings" panose="05000000000000000000" pitchFamily="2" charset="2"/>
+              <a:buChar char="ü"/>
+            </a:pPr>
             <a:r>
-              <a:rPr sz="1200" b="0">
-                <a:solidFill>
-                  <a:srgbClr val="556677"/>
+              <a:rPr lang="ko-KR" altLang="en-US" i="1" dirty="0">
+                <a:solidFill>
+                  <a:srgbClr val="3C7CDE"/>
                 </a:solidFill>
               </a:rPr>
-              <a:t>전세사기 피해 인정 3.9만건·HUG 사고액 2024년 4.49조원 / 보이스피싱 2025.1~11월 1.13조원(+56%)</a:t>
+              <a:t>해결해야 하는 대상</a:t>
             </a:r>
+            <a:endParaRPr lang="en-US" altLang="ko-KR" i="1" dirty="0">
+              <a:solidFill>
+                <a:srgbClr val="3C7CDE"/>
+              </a:solidFill>
+            </a:endParaRPr>
           </a:p>
           <a:p>
-            <a:pPr/>
+            <a:pPr marL="285750" indent="-285750">
+              <a:buFont typeface="Wingdings" panose="05000000000000000000" pitchFamily="2" charset="2"/>
+              <a:buChar char="ü"/>
+            </a:pPr>
             <a:r>
-              <a:rPr sz="1200" b="0">
-                <a:solidFill>
-                  <a:srgbClr val="556677"/>
+              <a:rPr lang="ko-KR" altLang="en-US" i="1" dirty="0">
+                <a:solidFill>
+                  <a:srgbClr val="3C7CDE"/>
                 </a:solidFill>
               </a:rPr>
-              <a:t>JB 관점: 지역 밀착·상생금융 직결 / 네이버클라우드 MOU(상담→심사→사후관리 AI)의 실행 수단</a:t>
+              <a:t>문제의 중요성</a:t>
             </a:r>
+            <a:r>
+              <a:rPr lang="en-US" altLang="ko-KR" i="1" dirty="0">
+                <a:solidFill>
+                  <a:srgbClr val="3C7CDE"/>
+                </a:solidFill>
+              </a:rPr>
+              <a:t>/</a:t>
+            </a:r>
+            <a:r>
+              <a:rPr lang="ko-KR" altLang="en-US" i="1" dirty="0">
+                <a:solidFill>
+                  <a:srgbClr val="3C7CDE"/>
+                </a:solidFill>
+              </a:rPr>
+              <a:t>발생 배경</a:t>
+            </a:r>
+            <a:endParaRPr lang="en-US" altLang="ko-KR" i="1" dirty="0">
+              <a:solidFill>
+                <a:srgbClr val="3C7CDE"/>
+              </a:solidFill>
+            </a:endParaRPr>
           </a:p>
           <a:p>
-            <a:pPr/>
+            <a:pPr marL="285750" indent="-285750">
+              <a:buFont typeface="Wingdings" panose="05000000000000000000" pitchFamily="2" charset="2"/>
+              <a:buChar char="ü"/>
+            </a:pPr>
             <a:r>
-              <a:rPr sz="1200" b="0">
-                <a:solidFill>
-                  <a:srgbClr val="556677"/>
+              <a:rPr lang="en-US" altLang="ko-KR" i="1" dirty="0">
+                <a:solidFill>
+                  <a:srgbClr val="3C7CDE"/>
                 </a:solidFill>
               </a:rPr>
-              <a:t>중요성: 사후관리 누락·대응 지연 = 건전성 저하·고객 이탈 위험</a:t>
+              <a:t>KPI </a:t>
             </a:r>
+            <a:r>
+              <a:rPr lang="ko-KR" altLang="en-US" i="1" dirty="0">
+                <a:solidFill>
+                  <a:srgbClr val="3C7CDE"/>
+                </a:solidFill>
+              </a:rPr>
+              <a:t>또는 해결 후 기대되는 변화 등</a:t>
+            </a:r>
+            <a:endParaRPr lang="en-US" altLang="ko-KR" i="1" dirty="0">
+              <a:solidFill>
+                <a:srgbClr val="3C7CDE"/>
+              </a:solidFill>
+            </a:endParaRPr>
           </a:p>
         </p:txBody>
       </p:sp>
@@ -15258,14 +15260,45 @@
           </a:bodyPr>
           <a:lstStyle/>
           <a:p>
-            <a:pPr/>
             <a:r>
-              <a:rPr sz="1200" b="1">
-                <a:solidFill>
-                  <a:srgbClr val="1F2D3D"/>
+              <a:rPr lang="en-US" altLang="ko-KR" sz="1400" b="1" dirty="0">
+                <a:solidFill>
+                  <a:srgbClr val="3C7CDE"/>
                 </a:solidFill>
               </a:rPr>
-              <a:t>Case→AgentRun→Agent→Skill→Evidence→Approval→Audit 운영 계약 위 멀티 에이전트가 케이스를 처리</a:t>
+              <a:t>[</a:t>
+            </a:r>
+            <a:r>
+              <a:rPr lang="ko-KR" altLang="en-US" sz="1400" b="1" dirty="0">
+                <a:solidFill>
+                  <a:srgbClr val="3C7CDE"/>
+                </a:solidFill>
+              </a:rPr>
+              <a:t>작성방법</a:t>
+            </a:r>
+            <a:r>
+              <a:rPr lang="en-US" altLang="ko-KR" sz="1400" b="1" dirty="0">
+                <a:solidFill>
+                  <a:srgbClr val="3C7CDE"/>
+                </a:solidFill>
+              </a:rPr>
+              <a:t>] - </a:t>
+            </a:r>
+            <a:r>
+              <a:rPr lang="ko-KR" altLang="en-US" b="1" dirty="0">
+                <a:solidFill>
+                  <a:srgbClr val="3C7CDE"/>
+                </a:solidFill>
+              </a:rPr>
+              <a:t>해당 부분은 참고용 안내 문구이며 제거하여도 좋습니다</a:t>
+            </a:r>
+            <a:r>
+              <a:rPr lang="en-US" altLang="ko-KR" b="1" dirty="0">
+                <a:solidFill>
+                  <a:srgbClr val="3C7CDE"/>
+                </a:solidFill>
+              </a:rPr>
+              <a:t>.</a:t>
             </a:r>
             <a:endParaRPr lang="en-US" altLang="ko-KR" sz="1400" b="1" dirty="0">
               <a:solidFill>
@@ -15274,36 +15307,91 @@
             </a:endParaRPr>
           </a:p>
           <a:p>
-            <a:pPr/>
-            <a:r>
-              <a:rPr sz="1200" b="0">
-                <a:solidFill>
-                  <a:srgbClr val="556677"/>
-                </a:solidFill>
-              </a:rPr>
-              <a:t>챗봇이 아니라 담당자에게 '근거 있는 판단 + 승인 가능한 행동 초안'을 제공</a:t>
-            </a:r>
+            <a:endParaRPr lang="en-US" altLang="ko-KR" sz="1400" b="1" dirty="0">
+              <a:solidFill>
+                <a:srgbClr val="3C7CDE"/>
+              </a:solidFill>
+            </a:endParaRPr>
           </a:p>
           <a:p>
-            <a:pPr/>
+            <a:pPr marL="285750" lvl="0" indent="-285750" latinLnBrk="1">
+              <a:buClrTx/>
+              <a:buFont typeface="Wingdings" panose="05000000000000000000" pitchFamily="2" charset="2"/>
+              <a:buChar char="ü"/>
+              <a:defRPr/>
+            </a:pPr>
             <a:r>
-              <a:rPr sz="1200" b="0">
-                <a:solidFill>
-                  <a:srgbClr val="556677"/>
-                </a:solidFill>
+              <a:rPr lang="ko-KR" altLang="en-US" i="1" kern="1200" dirty="0">
+                <a:solidFill>
+                  <a:srgbClr val="3C7CDE"/>
+                </a:solidFill>
+                <a:latin typeface="맑은 고딕" panose="02110004020202020204"/>
               </a:rPr>
-              <a:t>14 전문 에이전트 + 25 스킬, 사람 승인자(RM·준법) 2 + 승인 게이트가 고객 대상 행동을 통제</a:t>
+              <a:t>제안하는 </a:t>
             </a:r>
+            <a:r>
+              <a:rPr lang="en-US" altLang="ko-KR" i="1" kern="1200" dirty="0">
+                <a:solidFill>
+                  <a:srgbClr val="3C7CDE"/>
+                </a:solidFill>
+                <a:latin typeface="맑은 고딕" panose="02110004020202020204"/>
+              </a:rPr>
+              <a:t>AI </a:t>
+            </a:r>
+            <a:r>
+              <a:rPr lang="ko-KR" altLang="en-US" i="1" kern="1200" dirty="0">
+                <a:solidFill>
+                  <a:srgbClr val="3C7CDE"/>
+                </a:solidFill>
+                <a:latin typeface="맑은 고딕" panose="02110004020202020204"/>
+              </a:rPr>
+              <a:t>서비스의 전체 구조</a:t>
+            </a:r>
+            <a:endParaRPr lang="en-US" altLang="ko-KR" i="1" kern="1200" dirty="0">
+              <a:solidFill>
+                <a:srgbClr val="3C7CDE"/>
+              </a:solidFill>
+              <a:latin typeface="맑은 고딕" panose="02110004020202020204"/>
+            </a:endParaRPr>
           </a:p>
           <a:p>
-            <a:pPr/>
+            <a:pPr marL="285750" lvl="0" indent="-285750" latinLnBrk="1">
+              <a:buClrTx/>
+              <a:buFont typeface="Wingdings" panose="05000000000000000000" pitchFamily="2" charset="2"/>
+              <a:buChar char="ü"/>
+              <a:defRPr/>
+            </a:pPr>
             <a:r>
-              <a:rPr sz="1200" b="1">
-                <a:solidFill>
-                  <a:srgbClr val="1F2D3D"/>
-                </a:solidFill>
+              <a:rPr lang="ko-KR" altLang="en-US" i="1" kern="1200" dirty="0">
+                <a:solidFill>
+                  <a:srgbClr val="3C7CDE"/>
+                </a:solidFill>
+                <a:latin typeface="맑은 고딕" panose="02110004020202020204"/>
               </a:rPr>
-              <a:t>최대 차별점 — PII 비반출 데이터 거버넌스 4중 방어 (아래 그림)</a:t>
+              <a:t>서비스 구성</a:t>
+            </a:r>
+            <a:endParaRPr lang="en-US" altLang="ko-KR" i="1" kern="1200" dirty="0">
+              <a:solidFill>
+                <a:srgbClr val="3C7CDE"/>
+              </a:solidFill>
+              <a:latin typeface="맑은 고딕" panose="02110004020202020204"/>
+            </a:endParaRPr>
+          </a:p>
+          <a:p>
+            <a:pPr marL="285750" lvl="0" indent="-285750" latinLnBrk="1">
+              <a:buClrTx/>
+              <a:buFont typeface="Wingdings" panose="05000000000000000000" pitchFamily="2" charset="2"/>
+              <a:buChar char="ü"/>
+              <a:defRPr/>
+            </a:pPr>
+            <a:r>
+              <a:rPr lang="ko-KR" altLang="en-US" i="1" kern="1200" dirty="0">
+                <a:solidFill>
+                  <a:srgbClr val="3C7CDE"/>
+                </a:solidFill>
+                <a:latin typeface="맑은 고딕" panose="02110004020202020204"/>
+              </a:rPr>
+              <a:t>솔루션 전체 시나리오 요약 등</a:t>
             </a:r>
           </a:p>
         </p:txBody>
@@ -15594,30 +15682,6 @@
           <a:xfrm>
             <a:off x="380160" y="6542046"/>
             <a:ext cx="1125182" cy="189966"/>
-          </a:xfrm>
-          <a:prstGeom prst="rect">
-            <a:avLst/>
-          </a:prstGeom>
-        </p:spPr>
-      </p:pic>
-      <p:pic>
-        <p:nvPicPr>
-          <p:cNvPr id="18" name="Picture 17" descr="governance-4defense.png"/>
-          <p:cNvPicPr>
-            <a:picLocks noChangeAspect="1"/>
-          </p:cNvPicPr>
-          <p:nvPr/>
-        </p:nvPicPr>
-        <p:blipFill>
-          <a:blip r:embed="rId4"/>
-          <a:stretch>
-            <a:fillRect/>
-          </a:stretch>
-        </p:blipFill>
-        <p:spPr>
-          <a:xfrm>
-            <a:off x="2346944" y="3383280"/>
-            <a:ext cx="7498079" cy="1732590"/>
           </a:xfrm>
           <a:prstGeom prst="rect">
             <a:avLst/>
@@ -16085,14 +16149,53 @@
           </a:bodyPr>
           <a:lstStyle/>
           <a:p>
-            <a:pPr/>
             <a:r>
-              <a:rPr sz="1200" b="1">
-                <a:solidFill>
-                  <a:srgbClr val="1F2D3D"/>
+              <a:rPr lang="en-US" altLang="ko-KR" sz="1400" b="1" dirty="0">
+                <a:solidFill>
+                  <a:srgbClr val="3C7CDE"/>
                 </a:solidFill>
               </a:rPr>
-              <a:t>핵심 기능 6가지 — 모두 MVP에서 동작 확인</a:t>
+              <a:t>[</a:t>
+            </a:r>
+            <a:r>
+              <a:rPr lang="ko-KR" altLang="en-US" sz="1400" b="1" dirty="0">
+                <a:solidFill>
+                  <a:srgbClr val="3C7CDE"/>
+                </a:solidFill>
+              </a:rPr>
+              <a:t>작성방법</a:t>
+            </a:r>
+            <a:r>
+              <a:rPr lang="en-US" altLang="ko-KR" sz="1400" b="1" dirty="0">
+                <a:solidFill>
+                  <a:srgbClr val="3C7CDE"/>
+                </a:solidFill>
+              </a:rPr>
+              <a:t>]</a:t>
+            </a:r>
+            <a:r>
+              <a:rPr lang="en-US" altLang="ko-KR" b="1" dirty="0">
+                <a:solidFill>
+                  <a:srgbClr val="3C7CDE"/>
+                </a:solidFill>
+              </a:rPr>
+              <a:t> - </a:t>
+            </a:r>
+            <a:r>
+              <a:rPr lang="ko-KR" altLang="en-US" b="1" dirty="0">
+                <a:solidFill>
+                  <a:srgbClr val="3C7CDE"/>
+                </a:solidFill>
+              </a:rPr>
+              <a:t>해당 부분은 참고용 안내 문구이며 제거하여도 좋습니다</a:t>
+            </a:r>
+            <a:r>
+              <a:rPr lang="en-US" altLang="ko-KR" b="1" dirty="0">
+                <a:solidFill>
+                  <a:srgbClr val="3C7CDE"/>
+                </a:solidFill>
+              </a:rPr>
+              <a:t>.</a:t>
             </a:r>
             <a:endParaRPr lang="en-US" altLang="ko-KR" sz="1400" b="1" dirty="0">
               <a:solidFill>
@@ -16101,47 +16204,100 @@
             </a:endParaRPr>
           </a:p>
           <a:p>
-            <a:pPr/>
-            <a:r>
-              <a:rPr sz="1200" b="0">
-                <a:solidFill>
-                  <a:srgbClr val="556677"/>
-                </a:solidFill>
-              </a:rPr>
-              <a:t>케이스 운영보드/대시보드 — 칸반 이동이 실제 상태 전환 hook 발화</a:t>
-            </a:r>
+            <a:endParaRPr lang="en-US" altLang="ko-KR" sz="1400" b="1" dirty="0">
+              <a:solidFill>
+                <a:srgbClr val="3C7CDE"/>
+              </a:solidFill>
+            </a:endParaRPr>
           </a:p>
           <a:p>
-            <a:pPr/>
+            <a:pPr marL="285750" lvl="0" indent="-285750" latinLnBrk="1">
+              <a:buClrTx/>
+              <a:buFont typeface="Wingdings" panose="05000000000000000000" pitchFamily="2" charset="2"/>
+              <a:buChar char="ü"/>
+              <a:defRPr/>
+            </a:pPr>
             <a:r>
-              <a:rPr sz="1200" b="0">
-                <a:solidFill>
-                  <a:srgbClr val="556677"/>
-                </a:solidFill>
+              <a:rPr lang="ko-KR" altLang="en-US" i="1" kern="1200" dirty="0">
+                <a:solidFill>
+                  <a:srgbClr val="3C7CDE"/>
+                </a:solidFill>
+                <a:latin typeface="맑은 고딕" panose="02110004020202020204"/>
               </a:rPr>
-              <a:t>AgentRun 실행 — 판단·근거·confidence 단계 로그 / 스킬 저장소 25종(위험도·승인정책)</a:t>
+              <a:t>솔루션이 제공할 주요 기능들</a:t>
             </a:r>
+            <a:endParaRPr lang="en-US" altLang="ko-KR" i="1" kern="1200" dirty="0">
+              <a:solidFill>
+                <a:srgbClr val="3C7CDE"/>
+              </a:solidFill>
+              <a:latin typeface="맑은 고딕" panose="02110004020202020204"/>
+            </a:endParaRPr>
           </a:p>
           <a:p>
-            <a:pPr/>
+            <a:pPr marL="285750" lvl="0" indent="-285750" latinLnBrk="1">
+              <a:buClrTx/>
+              <a:buFont typeface="Wingdings" panose="05000000000000000000" pitchFamily="2" charset="2"/>
+              <a:buChar char="ü"/>
+              <a:defRPr/>
+            </a:pPr>
             <a:r>
-              <a:rPr sz="1200" b="0">
-                <a:solidFill>
-                  <a:srgbClr val="556677"/>
-                </a:solidFill>
+              <a:rPr lang="ko-KR" altLang="en-US" i="1" kern="1200" dirty="0">
+                <a:solidFill>
+                  <a:srgbClr val="3C7CDE"/>
+                </a:solidFill>
+                <a:latin typeface="맑은 고딕" panose="02110004020202020204"/>
               </a:rPr>
-              <a:t>데이터 거버넌스 패널 — 토큰화 전/후·모델 라우팅·반출 스캔·법령 칩</a:t>
+              <a:t>각 기능이 해결하는 업무</a:t>
             </a:r>
+            <a:r>
+              <a:rPr lang="en-US" altLang="ko-KR" i="1" kern="1200" dirty="0">
+                <a:solidFill>
+                  <a:srgbClr val="3C7CDE"/>
+                </a:solidFill>
+                <a:latin typeface="맑은 고딕" panose="02110004020202020204"/>
+              </a:rPr>
+              <a:t>/</a:t>
+            </a:r>
+            <a:r>
+              <a:rPr lang="ko-KR" altLang="en-US" i="1" kern="1200" dirty="0">
+                <a:solidFill>
+                  <a:srgbClr val="3C7CDE"/>
+                </a:solidFill>
+                <a:latin typeface="맑은 고딕" panose="02110004020202020204"/>
+              </a:rPr>
+              <a:t>문제</a:t>
+            </a:r>
+            <a:endParaRPr lang="en-US" altLang="ko-KR" i="1" kern="1200" dirty="0">
+              <a:solidFill>
+                <a:srgbClr val="3C7CDE"/>
+              </a:solidFill>
+              <a:latin typeface="맑은 고딕" panose="02110004020202020204"/>
+            </a:endParaRPr>
           </a:p>
           <a:p>
-            <a:pPr/>
+            <a:pPr marL="285750" lvl="0" indent="-285750" latinLnBrk="1">
+              <a:buClrTx/>
+              <a:buFont typeface="Wingdings" panose="05000000000000000000" pitchFamily="2" charset="2"/>
+              <a:buChar char="ü"/>
+              <a:defRPr/>
+            </a:pPr>
             <a:r>
-              <a:rPr sz="1200" b="0">
-                <a:solidFill>
-                  <a:srgbClr val="556677"/>
-                </a:solidFill>
+              <a:rPr lang="en-US" altLang="ko-KR" i="1" kern="1200" dirty="0">
+                <a:solidFill>
+                  <a:srgbClr val="3C7CDE"/>
+                </a:solidFill>
+                <a:latin typeface="맑은 고딕" panose="02110004020202020204"/>
               </a:rPr>
-              <a:t>승인 게이트 + 감사 원장(무결성 해시) / 전세 Shield(전세가율·권리·손실위험·계약·은행 연계)</a:t>
+              <a:t>MVP</a:t>
+            </a:r>
+            <a:r>
+              <a:rPr lang="ko-KR" altLang="en-US" i="1" kern="1200" dirty="0">
+                <a:solidFill>
+                  <a:srgbClr val="3C7CDE"/>
+                </a:solidFill>
+                <a:latin typeface="맑은 고딕" panose="02110004020202020204"/>
+              </a:rPr>
+              <a:t>로 구현할 핵심 기능 명확화 등</a:t>
             </a:r>
           </a:p>
         </p:txBody>
@@ -16432,30 +16588,6 @@
           <a:xfrm>
             <a:off x="380160" y="6542046"/>
             <a:ext cx="1125182" cy="189966"/>
-          </a:xfrm>
-          <a:prstGeom prst="rect">
-            <a:avLst/>
-          </a:prstGeom>
-        </p:spPr>
-      </p:pic>
-      <p:pic>
-        <p:nvPicPr>
-          <p:cNvPr id="18" name="Picture 17" descr="01-dashboard.png"/>
-          <p:cNvPicPr>
-            <a:picLocks noChangeAspect="1"/>
-          </p:cNvPicPr>
-          <p:nvPr/>
-        </p:nvPicPr>
-        <p:blipFill>
-          <a:blip r:embed="rId4"/>
-          <a:stretch>
-            <a:fillRect/>
-          </a:stretch>
-        </p:blipFill>
-        <p:spPr>
-          <a:xfrm>
-            <a:off x="4084304" y="3566160"/>
-            <a:ext cx="4023360" cy="2738120"/>
           </a:xfrm>
           <a:prstGeom prst="rect">
             <a:avLst/>
@@ -16909,14 +17041,53 @@
           </a:bodyPr>
           <a:lstStyle/>
           <a:p>
-            <a:pPr/>
             <a:r>
-              <a:rPr sz="1200" b="1">
-                <a:solidFill>
-                  <a:srgbClr val="1F2D3D"/>
+              <a:rPr lang="en-US" altLang="ko-KR" sz="1400" b="1" dirty="0">
+                <a:solidFill>
+                  <a:srgbClr val="3C7CDE"/>
                 </a:solidFill>
               </a:rPr>
-              <a:t>공개·공식 출처 우선 + 판단·행동·검증 멀티 에이전트</a:t>
+              <a:t>[</a:t>
+            </a:r>
+            <a:r>
+              <a:rPr lang="ko-KR" altLang="en-US" sz="1400" b="1" dirty="0">
+                <a:solidFill>
+                  <a:srgbClr val="3C7CDE"/>
+                </a:solidFill>
+              </a:rPr>
+              <a:t>작성방법</a:t>
+            </a:r>
+            <a:r>
+              <a:rPr lang="en-US" altLang="ko-KR" sz="1400" b="1" dirty="0">
+                <a:solidFill>
+                  <a:srgbClr val="3C7CDE"/>
+                </a:solidFill>
+              </a:rPr>
+              <a:t>]</a:t>
+            </a:r>
+            <a:r>
+              <a:rPr lang="en-US" altLang="ko-KR" b="1" dirty="0">
+                <a:solidFill>
+                  <a:srgbClr val="3C7CDE"/>
+                </a:solidFill>
+              </a:rPr>
+              <a:t>  - </a:t>
+            </a:r>
+            <a:r>
+              <a:rPr lang="ko-KR" altLang="en-US" b="1" dirty="0">
+                <a:solidFill>
+                  <a:srgbClr val="3C7CDE"/>
+                </a:solidFill>
+              </a:rPr>
+              <a:t>해당 부분은 참고용 안내 문구이며 제거하여도 좋습니다</a:t>
+            </a:r>
+            <a:r>
+              <a:rPr lang="en-US" altLang="ko-KR" b="1" dirty="0">
+                <a:solidFill>
+                  <a:srgbClr val="3C7CDE"/>
+                </a:solidFill>
+              </a:rPr>
+              <a:t>.</a:t>
             </a:r>
             <a:endParaRPr lang="en-US" altLang="ko-KR" sz="1400" b="1" dirty="0">
               <a:solidFill>
@@ -16925,47 +17096,113 @@
             </a:endParaRPr>
           </a:p>
           <a:p>
-            <a:pPr/>
-            <a:r>
-              <a:rPr sz="1200" b="0">
-                <a:solidFill>
-                  <a:srgbClr val="556677"/>
-                </a:solidFill>
-              </a:rPr>
-              <a:t>데이터: 공공데이터포털·한국은행 ECOS·HUG·국토부 실거래가·금융위 경보 (라이선스·제약 명시)</a:t>
-            </a:r>
+            <a:endParaRPr lang="en-US" altLang="ko-KR" sz="1400" b="1" dirty="0">
+              <a:solidFill>
+                <a:srgbClr val="3C7CDE"/>
+              </a:solidFill>
+            </a:endParaRPr>
           </a:p>
           <a:p>
-            <a:pPr/>
+            <a:pPr marL="285750" indent="-285750">
+              <a:buFont typeface="Wingdings" panose="05000000000000000000" pitchFamily="2" charset="2"/>
+              <a:buChar char="ü"/>
+            </a:pPr>
             <a:r>
-              <a:rPr sz="1200" b="0">
-                <a:solidFill>
-                  <a:srgbClr val="556677"/>
+              <a:rPr lang="ko-KR" altLang="en-US" i="1" dirty="0">
+                <a:solidFill>
+                  <a:srgbClr val="3C7CDE"/>
                 </a:solidFill>
               </a:rPr>
-              <a:t>기술: 멀티 에이전트 오케스트레이션(순차·병렬·에스컬레이션·검토 루프) + RAG + Rule Engine(L0–L4) + 모델 라우팅</a:t>
+              <a:t>활용 데이터 종류</a:t>
             </a:r>
+            <a:endParaRPr lang="en-US" altLang="ko-KR" i="1" dirty="0">
+              <a:solidFill>
+                <a:srgbClr val="3C7CDE"/>
+              </a:solidFill>
+            </a:endParaRPr>
           </a:p>
           <a:p>
-            <a:pPr/>
+            <a:pPr marL="285750" indent="-285750">
+              <a:buFont typeface="Wingdings" panose="05000000000000000000" pitchFamily="2" charset="2"/>
+              <a:buChar char="ü"/>
+            </a:pPr>
             <a:r>
-              <a:rPr sz="1200" b="1">
-                <a:solidFill>
-                  <a:srgbClr val="1F2D3D"/>
+              <a:rPr lang="ko-KR" altLang="en-US" i="1" dirty="0">
+                <a:solidFill>
+                  <a:srgbClr val="3C7CDE"/>
                 </a:solidFill>
               </a:rPr>
-              <a:t>PII 비반출: 상용 LLM 학습 미사용·국외이전 → 토큰화+국내 라우팅 (신용정보법 §40-2·PIPA §28-4/§28-5)</a:t>
+              <a:t>데이터 처리 방식</a:t>
             </a:r>
+            <a:endParaRPr lang="en-US" altLang="ko-KR" i="1" dirty="0">
+              <a:solidFill>
+                <a:srgbClr val="3C7CDE"/>
+              </a:solidFill>
+            </a:endParaRPr>
           </a:p>
           <a:p>
-            <a:pPr/>
+            <a:pPr marL="285750" indent="-285750">
+              <a:buFont typeface="Wingdings" panose="05000000000000000000" pitchFamily="2" charset="2"/>
+              <a:buChar char="ü"/>
+            </a:pPr>
             <a:r>
-              <a:rPr sz="1200" b="0">
-                <a:solidFill>
-                  <a:srgbClr val="556677"/>
+              <a:rPr lang="ko-KR" altLang="en-US" i="1" dirty="0">
+                <a:solidFill>
+                  <a:srgbClr val="3C7CDE"/>
                 </a:solidFill>
               </a:rPr>
-              <a:t>현재 Vanilla JS 정적 MVP → 본선 서버 API 승격(함수 계약 1:1)</a:t>
+              <a:t>모델</a:t>
+            </a:r>
+            <a:r>
+              <a:rPr lang="en-US" altLang="ko-KR" i="1" dirty="0">
+                <a:solidFill>
+                  <a:srgbClr val="3C7CDE"/>
+                </a:solidFill>
+              </a:rPr>
+              <a:t>/</a:t>
+            </a:r>
+            <a:r>
+              <a:rPr lang="ko-KR" altLang="en-US" i="1" dirty="0">
+                <a:solidFill>
+                  <a:srgbClr val="3C7CDE"/>
+                </a:solidFill>
+              </a:rPr>
+              <a:t>라이브러리</a:t>
+            </a:r>
+            <a:r>
+              <a:rPr lang="en-US" altLang="ko-KR" i="1" dirty="0">
+                <a:solidFill>
+                  <a:srgbClr val="3C7CDE"/>
+                </a:solidFill>
+              </a:rPr>
+              <a:t>/</a:t>
+            </a:r>
+            <a:r>
+              <a:rPr lang="ko-KR" altLang="en-US" i="1" dirty="0">
+                <a:solidFill>
+                  <a:srgbClr val="3C7CDE"/>
+                </a:solidFill>
+              </a:rPr>
+              <a:t>도구</a:t>
+            </a:r>
+            <a:endParaRPr lang="en-US" altLang="ko-KR" i="1" dirty="0">
+              <a:solidFill>
+                <a:srgbClr val="3C7CDE"/>
+              </a:solidFill>
+            </a:endParaRPr>
+          </a:p>
+          <a:p>
+            <a:pPr marL="285750" indent="-285750">
+              <a:buFont typeface="Wingdings" panose="05000000000000000000" pitchFamily="2" charset="2"/>
+              <a:buChar char="ü"/>
+            </a:pPr>
+            <a:r>
+              <a:rPr lang="ko-KR" altLang="en-US" i="1" dirty="0">
+                <a:solidFill>
+                  <a:srgbClr val="3C7CDE"/>
+                </a:solidFill>
+              </a:rPr>
+              <a:t>기술적 제약 및 해결 전략 등</a:t>
             </a:r>
           </a:p>
         </p:txBody>
@@ -17256,30 +17493,6 @@
           <a:xfrm>
             <a:off x="380160" y="6542046"/>
             <a:ext cx="1125182" cy="189966"/>
-          </a:xfrm>
-          <a:prstGeom prst="rect">
-            <a:avLst/>
-          </a:prstGeom>
-        </p:spPr>
-      </p:pic>
-      <p:pic>
-        <p:nvPicPr>
-          <p:cNvPr id="18" name="Picture 17" descr="05-governance.png"/>
-          <p:cNvPicPr>
-            <a:picLocks noChangeAspect="1"/>
-          </p:cNvPicPr>
-          <p:nvPr/>
-        </p:nvPicPr>
-        <p:blipFill>
-          <a:blip r:embed="rId4"/>
-          <a:stretch>
-            <a:fillRect/>
-          </a:stretch>
-        </p:blipFill>
-        <p:spPr>
-          <a:xfrm>
-            <a:off x="3992864" y="3520440"/>
-            <a:ext cx="4206240" cy="3901158"/>
           </a:xfrm>
           <a:prstGeom prst="rect">
             <a:avLst/>
@@ -17814,59 +18027,99 @@
           </a:bodyPr>
           <a:lstStyle/>
           <a:p>
-            <a:pPr/>
             <a:r>
-              <a:rPr sz="1200" b="1">
-                <a:solidFill>
-                  <a:srgbClr val="1F2D3D"/>
+              <a:rPr lang="en-US" altLang="ko-KR" sz="1400" b="1" dirty="0">
+                <a:solidFill>
+                  <a:srgbClr val="3C7CDE"/>
                 </a:solidFill>
               </a:rPr>
-              <a:t>대표 유스케이스 — 전주 중앙로 카페 (JBG-104, riskScore 88, 운전자금 1.8억·매출 둔화)</a:t>
+              <a:t>[</a:t>
+            </a:r>
+            <a:r>
+              <a:rPr lang="ko-KR" altLang="en-US" sz="1400" b="1" dirty="0">
+                <a:solidFill>
+                  <a:srgbClr val="3C7CDE"/>
+                </a:solidFill>
+              </a:rPr>
+              <a:t>작성방법</a:t>
+            </a:r>
+            <a:r>
+              <a:rPr lang="en-US" altLang="ko-KR" sz="1400" b="1" dirty="0">
+                <a:solidFill>
+                  <a:srgbClr val="3C7CDE"/>
+                </a:solidFill>
+              </a:rPr>
+              <a:t>]</a:t>
+            </a:r>
+            <a:r>
+              <a:rPr lang="en-US" altLang="ko-KR" b="1" dirty="0">
+                <a:solidFill>
+                  <a:srgbClr val="3C7CDE"/>
+                </a:solidFill>
+              </a:rPr>
+              <a:t>  - </a:t>
+            </a:r>
+            <a:r>
+              <a:rPr lang="ko-KR" altLang="en-US" b="1" dirty="0">
+                <a:solidFill>
+                  <a:srgbClr val="3C7CDE"/>
+                </a:solidFill>
+              </a:rPr>
+              <a:t>해당 부분은 참고용 안내 문구이며 제거하여도 좋습니다</a:t>
+            </a:r>
+            <a:r>
+              <a:rPr lang="en-US" altLang="ko-KR" b="1" dirty="0">
+                <a:solidFill>
+                  <a:srgbClr val="3C7CDE"/>
+                </a:solidFill>
+              </a:rPr>
+              <a:t>.</a:t>
             </a:r>
           </a:p>
           <a:p>
-            <a:pPr/>
-            <a:r>
-              <a:rPr sz="1200" b="0">
-                <a:solidFill>
-                  <a:srgbClr val="556677"/>
-                </a:solidFill>
-              </a:rPr>
-              <a:t>1) 케이스 열기 → 2) AgentRun: 상환위험 분류가 금리·매출 둔화 분해(근거·confidence)</a:t>
-            </a:r>
+            <a:endParaRPr lang="en-US" altLang="ko-KR" sz="1400" b="1" dirty="0">
+              <a:solidFill>
+                <a:srgbClr val="3C7CDE"/>
+              </a:solidFill>
+            </a:endParaRPr>
           </a:p>
           <a:p>
-            <a:pPr/>
+            <a:pPr marL="285750" indent="-285750">
+              <a:buFont typeface="Wingdings" panose="05000000000000000000" pitchFamily="2" charset="2"/>
+              <a:buChar char="ü"/>
+            </a:pPr>
             <a:r>
-              <a:rPr sz="1200" b="0">
-                <a:solidFill>
-                  <a:srgbClr val="556677"/>
+              <a:rPr lang="ko-KR" altLang="en-US" i="1" dirty="0">
+                <a:solidFill>
+                  <a:srgbClr val="3C7CDE"/>
                 </a:solidFill>
               </a:rPr>
-              <a:t>3) 정책금융 매칭(서류 체크리스트) → 4) RM 보좌 콜백 초안 → 준법 검토(과장·PII)</a:t>
+              <a:t>주요 사용자</a:t>
             </a:r>
+            <a:endParaRPr lang="en-US" altLang="ko-KR" i="1" dirty="0">
+              <a:solidFill>
+                <a:srgbClr val="3C7CDE"/>
+              </a:solidFill>
+            </a:endParaRPr>
           </a:p>
           <a:p>
-            <a:pPr/>
+            <a:pPr marL="285750" indent="-285750">
+              <a:buFont typeface="Wingdings" panose="05000000000000000000" pitchFamily="2" charset="2"/>
+              <a:buChar char="ü"/>
+            </a:pPr>
             <a:r>
-              <a:rPr sz="1200" b="0">
-                <a:solidFill>
-                  <a:srgbClr val="556677"/>
+              <a:rPr lang="ko-KR" altLang="en-US" i="1" dirty="0">
+                <a:solidFill>
+                  <a:srgbClr val="3C7CDE"/>
                 </a:solidFill>
               </a:rPr>
-              <a:t>5) 거버넌스 PII 토큰화·반출 스캔 → 6) RM 승인 → 감사 원장 기록(누가·무엇·언제·근거)</a:t>
+              <a:t>사용자 행동 흐름</a:t>
             </a:r>
-          </a:p>
-          <a:p>
-            <a:pPr/>
-            <a:r>
-              <a:rPr sz="1200" b="0">
-                <a:solidFill>
-                  <a:srgbClr val="556677"/>
-                </a:solidFill>
-              </a:rPr>
-              <a:t>보조: 전세 보호(?demo=jeonse) · 보이스피싱 외부 접촉 차단(?demo=phishing)</a:t>
-            </a:r>
+            <a:endParaRPr lang="en-US" altLang="ko-KR" i="1" dirty="0">
+              <a:solidFill>
+                <a:srgbClr val="3C7CDE"/>
+              </a:solidFill>
+            </a:endParaRPr>
           </a:p>
         </p:txBody>
       </p:sp>
@@ -18156,30 +18409,6 @@
           <a:xfrm>
             <a:off x="380160" y="6542046"/>
             <a:ext cx="1125182" cy="189966"/>
-          </a:xfrm>
-          <a:prstGeom prst="rect">
-            <a:avLst/>
-          </a:prstGeom>
-        </p:spPr>
-      </p:pic>
-      <p:pic>
-        <p:nvPicPr>
-          <p:cNvPr id="18" name="Picture 17" descr="02-case-detail.png"/>
-          <p:cNvPicPr>
-            <a:picLocks noChangeAspect="1"/>
-          </p:cNvPicPr>
-          <p:nvPr/>
-        </p:nvPicPr>
-        <p:blipFill>
-          <a:blip r:embed="rId4"/>
-          <a:stretch>
-            <a:fillRect/>
-          </a:stretch>
-        </p:blipFill>
-        <p:spPr>
-          <a:xfrm>
-            <a:off x="4038584" y="3383280"/>
-            <a:ext cx="4114800" cy="2800350"/>
           </a:xfrm>
           <a:prstGeom prst="rect">
             <a:avLst/>
@@ -18657,14 +18886,45 @@
           </a:bodyPr>
           <a:lstStyle/>
           <a:p>
-            <a:pPr/>
             <a:r>
-              <a:rPr sz="1200" b="1">
-                <a:solidFill>
-                  <a:srgbClr val="1F2D3D"/>
+              <a:rPr lang="en-US" altLang="ko-KR" sz="1400" b="1" dirty="0">
+                <a:solidFill>
+                  <a:srgbClr val="3C7CDE"/>
                 </a:solidFill>
               </a:rPr>
-              <a:t>KPI: triage 시간 50%↓ · 판단 100% 근거 연결 · 고객 행동 100% 승인 통과 · 사후관리 누락 0건 · 전세 100% 체크리스트</a:t>
+              <a:t>[</a:t>
+            </a:r>
+            <a:r>
+              <a:rPr lang="ko-KR" altLang="en-US" sz="1400" b="1" dirty="0">
+                <a:solidFill>
+                  <a:srgbClr val="3C7CDE"/>
+                </a:solidFill>
+              </a:rPr>
+              <a:t>작성방법</a:t>
+            </a:r>
+            <a:r>
+              <a:rPr lang="en-US" altLang="ko-KR" sz="1400" b="1" dirty="0">
+                <a:solidFill>
+                  <a:srgbClr val="3C7CDE"/>
+                </a:solidFill>
+              </a:rPr>
+              <a:t>] - </a:t>
+            </a:r>
+            <a:r>
+              <a:rPr lang="ko-KR" altLang="en-US" b="1" dirty="0">
+                <a:solidFill>
+                  <a:srgbClr val="3C7CDE"/>
+                </a:solidFill>
+              </a:rPr>
+              <a:t>해당 부분은 참고용 안내 문구이며 제거하여도 좋습니다</a:t>
+            </a:r>
+            <a:r>
+              <a:rPr lang="en-US" altLang="ko-KR" b="1" dirty="0">
+                <a:solidFill>
+                  <a:srgbClr val="3C7CDE"/>
+                </a:solidFill>
+              </a:rPr>
+              <a:t>.</a:t>
             </a:r>
             <a:endParaRPr lang="en-US" altLang="ko-KR" sz="1400" b="1" dirty="0">
               <a:solidFill>
@@ -18673,36 +18933,78 @@
             </a:endParaRPr>
           </a:p>
           <a:p>
-            <a:pPr/>
-            <a:r>
-              <a:rPr sz="1200" b="0">
-                <a:solidFill>
-                  <a:srgbClr val="556677"/>
-                </a:solidFill>
-              </a:rPr>
-              <a:t>확장: 계열사(광주은행·JB우리캐피탈·자산운용) · 업무영역(기업여신 심사·WM) · 고객군(중소기업·가계)</a:t>
-            </a:r>
+            <a:endParaRPr lang="en-US" altLang="ko-KR" sz="1400" b="1" dirty="0">
+              <a:solidFill>
+                <a:srgbClr val="3C7CDE"/>
+              </a:solidFill>
+            </a:endParaRPr>
           </a:p>
           <a:p>
-            <a:pPr/>
+            <a:pPr marL="285750" indent="-285750">
+              <a:buFont typeface="Wingdings" panose="05000000000000000000" pitchFamily="2" charset="2"/>
+              <a:buChar char="ü"/>
+            </a:pPr>
             <a:r>
-              <a:rPr sz="1200" b="0">
-                <a:solidFill>
-                  <a:srgbClr val="556677"/>
+              <a:rPr lang="ko-KR" altLang="en-US" i="1" dirty="0">
+                <a:solidFill>
+                  <a:srgbClr val="3C7CDE"/>
                 </a:solidFill>
               </a:rPr>
-              <a:t>발전 경로: PoC(현재) → 파일럿(1개 본부) → 내부 적용(네이버클라우드 MOU 방향) → 고객 서비스화</a:t>
+              <a:t>현장에서 기대되는 정량</a:t>
             </a:r>
+            <a:r>
+              <a:rPr lang="en-US" altLang="ko-KR" i="1" dirty="0">
+                <a:solidFill>
+                  <a:srgbClr val="3C7CDE"/>
+                </a:solidFill>
+              </a:rPr>
+              <a:t> </a:t>
+            </a:r>
+            <a:r>
+              <a:rPr lang="ko-KR" altLang="en-US" i="1" dirty="0">
+                <a:solidFill>
+                  <a:srgbClr val="3C7CDE"/>
+                </a:solidFill>
+              </a:rPr>
+              <a:t>또는 정성 효과</a:t>
+            </a:r>
+            <a:endParaRPr lang="en-US" altLang="ko-KR" i="1" dirty="0">
+              <a:solidFill>
+                <a:srgbClr val="3C7CDE"/>
+              </a:solidFill>
+            </a:endParaRPr>
           </a:p>
           <a:p>
-            <a:pPr/>
+            <a:pPr marL="285750" indent="-285750">
+              <a:buFont typeface="Wingdings" panose="05000000000000000000" pitchFamily="2" charset="2"/>
+              <a:buChar char="ü"/>
+            </a:pPr>
             <a:r>
-              <a:rPr sz="1200" b="1">
-                <a:solidFill>
-                  <a:srgbClr val="1F2D3D"/>
+              <a:rPr lang="ko-KR" altLang="en-US" i="1" dirty="0">
+                <a:solidFill>
+                  <a:srgbClr val="3C7CDE"/>
                 </a:solidFill>
               </a:rPr>
-              <a:t>리스크 대응: PII 비반출 · 환각(근거·불확실성·다음확인 의무) · 설명가능성 · 책임소재(승인+무결성 감사)</a:t>
+              <a:t>확장 가능성</a:t>
+            </a:r>
+            <a:endParaRPr lang="en-US" altLang="ko-KR" i="1" dirty="0">
+              <a:solidFill>
+                <a:srgbClr val="3C7CDE"/>
+              </a:solidFill>
+            </a:endParaRPr>
+          </a:p>
+          <a:p>
+            <a:pPr marL="285750" indent="-285750">
+              <a:buFont typeface="Wingdings" panose="05000000000000000000" pitchFamily="2" charset="2"/>
+              <a:buChar char="ü"/>
+            </a:pPr>
+            <a:r>
+              <a:rPr lang="ko-KR" altLang="en-US" i="1" dirty="0">
+                <a:solidFill>
+                  <a:srgbClr val="3C7CDE"/>
+                </a:solidFill>
+              </a:rPr>
+              <a:t>향후 고도화 가능성 등</a:t>
             </a:r>
           </a:p>
         </p:txBody>
@@ -18993,30 +19295,6 @@
           <a:xfrm>
             <a:off x="380160" y="6542046"/>
             <a:ext cx="1125182" cy="189966"/>
-          </a:xfrm>
-          <a:prstGeom prst="rect">
-            <a:avLst/>
-          </a:prstGeom>
-        </p:spPr>
-      </p:pic>
-      <p:pic>
-        <p:nvPicPr>
-          <p:cNvPr id="18" name="Picture 17" descr="06-budget.png"/>
-          <p:cNvPicPr>
-            <a:picLocks noChangeAspect="1"/>
-          </p:cNvPicPr>
-          <p:nvPr/>
-        </p:nvPicPr>
-        <p:blipFill>
-          <a:blip r:embed="rId4"/>
-          <a:stretch>
-            <a:fillRect/>
-          </a:stretch>
-        </p:blipFill>
-        <p:spPr>
-          <a:xfrm>
-            <a:off x="3992864" y="3566160"/>
-            <a:ext cx="4206240" cy="2862580"/>
           </a:xfrm>
           <a:prstGeom prst="rect">
             <a:avLst/>
